--- a/decks/hist-hastings/hist-hastings_ch1_throne-up-for-grabs.pptx
+++ b/decks/hist-hastings/hist-hastings_ch1_throne-up-for-grabs.pptx
@@ -124,29 +124,29 @@
   <p:extLst>
     <p:ext uri="{521415D9-36F7-43E2-AB2F-B90AF26B5E84}">
       <p14:sectionLst xmlns:p14="http://schemas.microsoft.com/office/powerpoint/2010/main">
-        <p14:section name="Opening" id="{372a0645-2b54-3f48-1617-930750c8d4cb}">
+        <p14:section name="Opening" id="{04f19984-b29b-78ee-d5e4-d03dba56553c}">
           <p14:sldIdLst>
             <p14:sldId id="256"/>
           </p14:sldIdLst>
         </p14:section>
-        <p14:section name="Gate" id="{06dd0812-3a9e-7305-551c-20fe6df3b2c4}">
+        <p14:section name="Gate" id="{7e667273-aa97-96e5-ace5-7e119d4d56f2}">
           <p14:sldIdLst>
             <p14:sldId id="257"/>
             <p14:sldId id="258"/>
           </p14:sldIdLst>
         </p14:section>
-        <p14:section name="Pre-teach" id="{ba471e6e-1bd2-2977-d6e0-a38235bf6f3b}">
+        <p14:section name="Pre-teach" id="{8d2209e1-b25a-6700-87a4-9341aa47d0d2}">
           <p14:sldIdLst>
             <p14:sldId id="259"/>
           </p14:sldIdLst>
         </p14:section>
-        <p14:section name="Read-along" id="{c6ff3266-86c7-8b7f-3282-fd6085e91613}">
+        <p14:section name="Read-along" id="{dbae35b5-ecff-b6c9-822e-dce271f0a9a7}">
           <p14:sldIdLst>
             <p14:sldId id="260"/>
             <p14:sldId id="261"/>
           </p14:sldIdLst>
         </p14:section>
-        <p14:section name="Teach" id="{4f84c191-2710-235a-1d60-db8b65a74413}">
+        <p14:section name="Teach" id="{f8a02a4b-e4a2-bbb2-0aa4-76fe63e521dc}">
           <p14:sldIdLst>
             <p14:sldId id="262"/>
             <p14:sldId id="263"/>
@@ -154,7 +154,7 @@
             <p14:sldId id="265"/>
           </p14:sldIdLst>
         </p14:section>
-        <p14:section name="Routes" id="{865729bd-d864-87f0-b221-3ce3ec9f4a99}">
+        <p14:section name="Routes" id="{c8345739-80d3-a180-1068-93c46626455f}">
           <p14:sldIdLst>
             <p14:sldId id="266"/>
             <p14:sldId id="267"/>
@@ -162,12 +162,12 @@
             <p14:sldId id="269"/>
           </p14:sldIdLst>
         </p14:section>
-        <p14:section name="Close" id="{90d0edc6-3820-cd9d-e980-2e26b6798407}">
+        <p14:section name="Close" id="{13fe7f05-9589-d889-2d26-62500f707e57}">
           <p14:sldIdLst>
             <p14:sldId id="270"/>
           </p14:sldIdLst>
         </p14:section>
-        <p14:section name="Answers" id="{266b8d2a-b3d3-fbc0-1ef2-59504b992a8d}">
+        <p14:section name="Answers" id="{29d6984b-76b6-da3e-f840-fce9e7d50fe2}">
           <p14:sldIdLst>
             <p14:sldId id="271"/>
             <p14:sldId id="272"/>
@@ -1139,7 +1139,7 @@
               <a:rPr lang="en-US" dirty="0"/>
               <a:t>Exit ticket — individual, silent, on a slip or mini-whiteboard. Recall before help: no notes, no lanes, no hints. Collect before pupils leave.
 Question: Why was it not clear who should be king when Edward the Confessor died?
-Answer: D   Edward had no children, and he had let his earls rule for him. Edward had no son or heir, and because he relied on his earls to rule, nobody could be sure who he wanted to take over.
+Answer: B   Edward had no children, and he had let his earls rule for him. Edward had no son or heir, and because he relied on his earls to rule, nobody could be sure who he wanted to take over.
 Source of this question: gate item 1 re-asked (options rotated) — this chapter has no third quick-check module.
 The ebook also holds task 3, "Who should be king?", for homework or the next lesson's do now.
 Sort the slips: correct → ready to move on; incorrect → start next lesson in the pre-teach group, with the read-along and the Support lane. Same destination next time.</a:t>
@@ -1413,7 +1413,7 @@
             <a:r>
               <a:rPr lang="en-US" dirty="0"/>
               <a:t>Answers — exit ticket: Exit ticket. Reveal the answer; pupils mark their own work in a different colour, then read the "why" together. Same destination for every lane, so one answer serves the whole class.
-Answer: D   Edward had no children, and he had let his earls rule for him
+Answer: B   Edward had no children, and he had let his earls rule for him
 Why: Edward had no son or heir, and because he relied on his earls to rule, nobody could be sure who he wanted to take over.
 Ask a Support pupil to explain one step, and a Stretch pupil to share their extension.</a:t>
             </a:r>
@@ -1504,7 +1504,7 @@
             <a:r>
               <a:rPr lang="en-US" dirty="0"/>
               <a:t>Do now — retrieval. Silent, no notes, no help: recall comes before any support. Give about four minutes.
-1. Why was it not clear who should be king when Edward the Confessor died?  →  A   Edward had no children, and he had let his earls rule for him
+1. Why was it not clear who should be king when Edward the Confessor died?  →  C   Edward had no children, and he had let his earls rule for him
 2. Edward the Confessor became king in 1042 and died in 1066. For how many years was he king?  →  24 years
 3. Harold Godwinson was crowned on 6 January 1066, the same day as Edward's ___.  →  funeral
 Circulate: who gets 3/3 (Stretch route), 2/3 (Core), 0–1 (Support)? Use this to route pupils later in the lesson.</a:t>
@@ -1596,7 +1596,7 @@
             <a:r>
               <a:rPr lang="en-US" dirty="0"/>
               <a:t>Answers — pupils mark their own in a different colour, then hands up for 3/3, 2/3, 1/3.
-1. A   Edward had no children, and he had let his earls rule for him. Edward had no son or heir, and because he relied on his earls to rule, nobody could be sure who he wanted to take over.
+1. C   Edward had no children, and he had let his earls rule for him. Edward had no son or heir, and because he relied on his earls to rule, nobody could be sure who he wanted to take over.
 2. 24 years. 1066 − 1042 = 24. Subtract the earlier AD date from the later one to find the gap.
 3. funeral. Edward was buried on 6 January, and Harold was crowned in Westminster Abbey the same day, so that England had a king at once.
 Say the route each score points to: 3/3 Stretch, 2/3 Core, 0–1 Support. Pupils may choose to move up.</a:t>
@@ -8376,7 +8376,7 @@
                 <a:ea typeface="Calibri" pitchFamily="34" charset="-122"/>
                 <a:cs typeface="Calibri" pitchFamily="34" charset="-120"/>
               </a:rPr>
-              <a:t>Edward had twin sons who both wanted the throne</a:t>
+              <a:t>Edward had given the crown to the Pope</a:t>
             </a:r>
             <a:endParaRPr lang="en-US" sz="2400" dirty="0"/>
           </a:p>
@@ -8413,7 +8413,7 @@
                 <a:ea typeface="Calibri" pitchFamily="34" charset="-122"/>
                 <a:cs typeface="Calibri" pitchFamily="34" charset="-120"/>
               </a:rPr>
-              <a:t>England had never had a king before</a:t>
+              <a:t>Edward had no children, and he had let his earls rule for him</a:t>
             </a:r>
             <a:endParaRPr lang="en-US" sz="2400" dirty="0"/>
           </a:p>
@@ -8450,7 +8450,7 @@
                 <a:ea typeface="Calibri" pitchFamily="34" charset="-122"/>
                 <a:cs typeface="Calibri" pitchFamily="34" charset="-120"/>
               </a:rPr>
-              <a:t>Edward had given the crown to the Pope</a:t>
+              <a:t>Edward had twin sons who both wanted the throne</a:t>
             </a:r>
             <a:endParaRPr lang="en-US" sz="2400" dirty="0"/>
           </a:p>
@@ -8487,7 +8487,7 @@
                 <a:ea typeface="Calibri" pitchFamily="34" charset="-122"/>
                 <a:cs typeface="Calibri" pitchFamily="34" charset="-120"/>
               </a:rPr>
-              <a:t>Edward had no children, and he had let his earls rule for him</a:t>
+              <a:t>England had never had a king before</a:t>
             </a:r>
             <a:endParaRPr lang="en-US" sz="2400" dirty="0"/>
           </a:p>
@@ -10069,7 +10069,7 @@
                 <a:ea typeface="Cambria" pitchFamily="34" charset="-122"/>
                 <a:cs typeface="Cambria" pitchFamily="34" charset="-120"/>
               </a:rPr>
-              <a:t>D   Edward had no children, and he had let his earls rule for him</a:t>
+              <a:t>B   Edward had no children, and he had let his earls rule for him</a:t>
             </a:r>
             <a:endParaRPr lang="en-US" sz="1800" dirty="0"/>
           </a:p>
@@ -10603,7 +10603,7 @@
                 <a:ea typeface="Calibri" pitchFamily="34" charset="-122"/>
                 <a:cs typeface="Calibri" pitchFamily="34" charset="-120"/>
               </a:rPr>
-              <a:t>Edward had no children, and he had let his earls rule for him</a:t>
+              <a:t>England had never had a king before</a:t>
             </a:r>
             <a:endParaRPr lang="en-US" sz="2200" dirty="0"/>
           </a:p>
@@ -10640,7 +10640,7 @@
                 <a:ea typeface="Calibri" pitchFamily="34" charset="-122"/>
                 <a:cs typeface="Calibri" pitchFamily="34" charset="-120"/>
               </a:rPr>
-              <a:t>Edward had twin sons who both wanted the throne</a:t>
+              <a:t>Edward had given the crown to the Pope</a:t>
             </a:r>
             <a:endParaRPr lang="en-US" sz="2200" dirty="0"/>
           </a:p>
@@ -10677,7 +10677,7 @@
                 <a:ea typeface="Calibri" pitchFamily="34" charset="-122"/>
                 <a:cs typeface="Calibri" pitchFamily="34" charset="-120"/>
               </a:rPr>
-              <a:t>England had never had a king before</a:t>
+              <a:t>Edward had no children, and he had let his earls rule for him</a:t>
             </a:r>
             <a:endParaRPr lang="en-US" sz="2200" dirty="0"/>
           </a:p>
@@ -10714,7 +10714,7 @@
                 <a:ea typeface="Calibri" pitchFamily="34" charset="-122"/>
                 <a:cs typeface="Calibri" pitchFamily="34" charset="-120"/>
               </a:rPr>
-              <a:t>Edward had given the crown to the Pope</a:t>
+              <a:t>Edward had twin sons who both wanted the throne</a:t>
             </a:r>
             <a:endParaRPr lang="en-US" sz="2200" dirty="0"/>
           </a:p>
@@ -11511,7 +11511,7 @@
                 <a:ea typeface="Calibri" pitchFamily="34" charset="-122"/>
                 <a:cs typeface="Calibri" pitchFamily="34" charset="-120"/>
               </a:rPr>
-              <a:t>A   Edward had no children, and he had let his earls rule for him</a:t>
+              <a:t>C   Edward had no children, and he had let his earls rule for him</a:t>
             </a:r>
             <a:endParaRPr lang="en-US" sz="2200" dirty="0"/>
           </a:p>

--- a/decks/hist-hastings/hist-hastings_ch1_throne-up-for-grabs.pptx
+++ b/decks/hist-hastings/hist-hastings_ch1_throne-up-for-grabs.pptx
@@ -124,29 +124,29 @@
   <p:extLst>
     <p:ext uri="{521415D9-36F7-43E2-AB2F-B90AF26B5E84}">
       <p14:sectionLst xmlns:p14="http://schemas.microsoft.com/office/powerpoint/2010/main">
-        <p14:section name="Opening" id="{04f19984-b29b-78ee-d5e4-d03dba56553c}">
+        <p14:section name="Opening" id="{a01b1705-b3f3-25da-3b1e-43159a8f63bf}">
           <p14:sldIdLst>
             <p14:sldId id="256"/>
           </p14:sldIdLst>
         </p14:section>
-        <p14:section name="Gate" id="{7e667273-aa97-96e5-ace5-7e119d4d56f2}">
+        <p14:section name="Gate" id="{5b4416f4-5c17-407e-9e52-afcf0c4b1d3f}">
           <p14:sldIdLst>
             <p14:sldId id="257"/>
             <p14:sldId id="258"/>
           </p14:sldIdLst>
         </p14:section>
-        <p14:section name="Pre-teach" id="{8d2209e1-b25a-6700-87a4-9341aa47d0d2}">
+        <p14:section name="Pre-teach" id="{54747a0b-527e-9b7a-48b7-fc8eb6660d7a}">
           <p14:sldIdLst>
             <p14:sldId id="259"/>
           </p14:sldIdLst>
         </p14:section>
-        <p14:section name="Read-along" id="{dbae35b5-ecff-b6c9-822e-dce271f0a9a7}">
+        <p14:section name="Read-along" id="{a65c2f93-5b44-48f5-8adc-aad0e7285d40}">
           <p14:sldIdLst>
             <p14:sldId id="260"/>
             <p14:sldId id="261"/>
           </p14:sldIdLst>
         </p14:section>
-        <p14:section name="Teach" id="{f8a02a4b-e4a2-bbb2-0aa4-76fe63e521dc}">
+        <p14:section name="Teach" id="{2978b56c-d810-be13-f108-db263418693e}">
           <p14:sldIdLst>
             <p14:sldId id="262"/>
             <p14:sldId id="263"/>
@@ -154,7 +154,7 @@
             <p14:sldId id="265"/>
           </p14:sldIdLst>
         </p14:section>
-        <p14:section name="Routes" id="{c8345739-80d3-a180-1068-93c46626455f}">
+        <p14:section name="Routes" id="{28abbbd0-dad1-db33-2194-d74011312e00}">
           <p14:sldIdLst>
             <p14:sldId id="266"/>
             <p14:sldId id="267"/>
@@ -162,12 +162,12 @@
             <p14:sldId id="269"/>
           </p14:sldIdLst>
         </p14:section>
-        <p14:section name="Close" id="{13fe7f05-9589-d889-2d26-62500f707e57}">
+        <p14:section name="Close" id="{089f9e59-f22e-70ee-9b57-462869203898}">
           <p14:sldIdLst>
             <p14:sldId id="270"/>
           </p14:sldIdLst>
         </p14:section>
-        <p14:section name="Answers" id="{29d6984b-76b6-da3e-f840-fce9e7d50fe2}">
+        <p14:section name="Answers" id="{7ccf9bff-a39a-8795-869e-9aa4542a5f75}">
           <p14:sldIdLst>
             <p14:sldId id="271"/>
             <p14:sldId id="272"/>
